--- a/dataset/guides_final/ACC/manual/IT-ACC-002-M_비밀번호 변경·초기화 처리 매뉴얼.pptx
+++ b/dataset/guides_final/ACC/manual/IT-ACC-002-M_비밀번호 변경·초기화 처리 매뉴얼.pptx
@@ -33920,7 +33920,7 @@
                 <a:ea typeface="Malgun Gothic"/>
                 <a:cs typeface="Malgun Gothic"/>
               </a:rPr>
-              <a:t>티켓: 임시 비밀번호 발급, 초기화 반복 실패 점검처럼 담당자 작업이 필요한 건. RDY → IP → FIN → CLS 으로 관리한다.</a:t>
+              <a:t>티켓: 임시 비밀번호 발급, 초기화 반복 실패 점검처럼 담당자 작업이 필요한 건. RDY → WIP → FIN → CLS 으로 관리한다.</a:t>
             </a:r>
           </a:p>
         </p:txBody>

--- a/dataset/guides_final/ACC/manual/IT-ACC-002-M_비밀번호 변경·초기화 처리 매뉴얼.pptx
+++ b/dataset/guides_final/ACC/manual/IT-ACC-002-M_비밀번호 변경·초기화 처리 매뉴얼.pptx
@@ -3239,7 +3239,7 @@
                 <a:ea typeface="Malgun Gothic"/>
                 <a:cs typeface="Malgun Gothic"/>
               </a:rPr>
-              <a:t>한화시스템 ICT IT 담당자 매뉴얼 · 계정·로그인</a:t>
+              <a:t>가상 ICT 기업 IT 담당자 매뉴얼 · 계정·로그인</a:t>
             </a:r>
           </a:p>
         </p:txBody>
@@ -3518,7 +3518,7 @@
                 <a:ea typeface="Malgun Gothic"/>
                 <a:cs typeface="Malgun Gothic"/>
               </a:rPr>
-              <a:t>© HANWHA SYSTEMS ICT · IT-ACC-002-M · 사내 제한</a:t>
+              <a:t>© 가상 ICT 기업 · IT-ACC-002-M · 사내 제한</a:t>
             </a:r>
           </a:p>
         </p:txBody>
@@ -3766,7 +3766,7 @@
                 <a:ea typeface="Malgun Gothic"/>
                 <a:cs typeface="Malgun Gothic"/>
               </a:rPr>
-              <a:t>© HANWHA SYSTEMS ICT · IT-ACC-002-M · 사내 제한</a:t>
+              <a:t>© 가상 ICT 기업 · IT-ACC-002-M · 사내 제한</a:t>
             </a:r>
           </a:p>
         </p:txBody>
@@ -6488,7 +6488,7 @@
                 <a:ea typeface="Malgun Gothic"/>
                 <a:cs typeface="Malgun Gothic"/>
               </a:rPr>
-              <a:t>© HANWHA SYSTEMS ICT · IT-ACC-002-M · 사내 제한</a:t>
+              <a:t>© 가상 ICT 기업 · IT-ACC-002-M · 사내 제한</a:t>
             </a:r>
           </a:p>
         </p:txBody>
@@ -7413,7 +7413,7 @@
                 <a:ea typeface="Malgun Gothic"/>
                 <a:cs typeface="Malgun Gothic"/>
               </a:rPr>
-              <a:t>© HANWHA SYSTEMS ICT · IT-ACC-002-M · 사내 제한</a:t>
+              <a:t>© 가상 ICT 기업 · IT-ACC-002-M · 사내 제한</a:t>
             </a:r>
           </a:p>
         </p:txBody>
@@ -10329,7 +10329,7 @@
                 <a:ea typeface="Malgun Gothic"/>
                 <a:cs typeface="Malgun Gothic"/>
               </a:rPr>
-              <a:t>© HANWHA SYSTEMS ICT · IT-ACC-002-M · 사내 제한</a:t>
+              <a:t>© 가상 ICT 기업 · IT-ACC-002-M · 사내 제한</a:t>
             </a:r>
           </a:p>
         </p:txBody>
@@ -12885,7 +12885,7 @@
                 <a:ea typeface="Malgun Gothic"/>
                 <a:cs typeface="Malgun Gothic"/>
               </a:rPr>
-              <a:t>© HANWHA SYSTEMS ICT · IT-ACC-002-M · 사내 제한</a:t>
+              <a:t>© 가상 ICT 기업 · IT-ACC-002-M · 사내 제한</a:t>
             </a:r>
           </a:p>
         </p:txBody>
@@ -13810,7 +13810,7 @@
                 <a:ea typeface="Malgun Gothic"/>
                 <a:cs typeface="Malgun Gothic"/>
               </a:rPr>
-              <a:t>© HANWHA SYSTEMS ICT · IT-ACC-002-M · 사내 제한</a:t>
+              <a:t>© 가상 ICT 기업 · IT-ACC-002-M · 사내 제한</a:t>
             </a:r>
           </a:p>
         </p:txBody>
@@ -16554,7 +16554,7 @@
                 <a:ea typeface="Malgun Gothic"/>
                 <a:cs typeface="Malgun Gothic"/>
               </a:rPr>
-              <a:t>© HANWHA SYSTEMS ICT · IT-ACC-002-M · 사내 제한</a:t>
+              <a:t>© 가상 ICT 기업 · IT-ACC-002-M · 사내 제한</a:t>
             </a:r>
           </a:p>
         </p:txBody>
@@ -17479,7 +17479,7 @@
                 <a:ea typeface="Malgun Gothic"/>
                 <a:cs typeface="Malgun Gothic"/>
               </a:rPr>
-              <a:t>© HANWHA SYSTEMS ICT · IT-ACC-002-M · 사내 제한</a:t>
+              <a:t>© 가상 ICT 기업 · IT-ACC-002-M · 사내 제한</a:t>
             </a:r>
           </a:p>
         </p:txBody>
@@ -20254,7 +20254,7 @@
                 <a:ea typeface="Malgun Gothic"/>
                 <a:cs typeface="Malgun Gothic"/>
               </a:rPr>
-              <a:t>© HANWHA SYSTEMS ICT · IT-ACC-002-M · 사내 제한</a:t>
+              <a:t>© 가상 ICT 기업 · IT-ACC-002-M · 사내 제한</a:t>
             </a:r>
           </a:p>
         </p:txBody>
@@ -21544,7 +21544,7 @@
                 <a:ea typeface="Malgun Gothic"/>
                 <a:cs typeface="Malgun Gothic"/>
               </a:rPr>
-              <a:t>© HANWHA SYSTEMS ICT · IT-ACC-002-M · 사내 제한</a:t>
+              <a:t>© 가상 ICT 기업 · IT-ACC-002-M · 사내 제한</a:t>
             </a:r>
           </a:p>
         </p:txBody>
@@ -23187,7 +23187,7 @@
                 <a:ea typeface="Malgun Gothic"/>
                 <a:cs typeface="Malgun Gothic"/>
               </a:rPr>
-              <a:t>© HANWHA SYSTEMS ICT · IT-ACC-002-M · 사내 제한</a:t>
+              <a:t>© 가상 ICT 기업 · IT-ACC-002-M · 사내 제한</a:t>
             </a:r>
           </a:p>
         </p:txBody>
@@ -23435,7 +23435,7 @@
                 <a:ea typeface="Malgun Gothic"/>
                 <a:cs typeface="Malgun Gothic"/>
               </a:rPr>
-              <a:t>© HANWHA SYSTEMS ICT · IT-ACC-002-M · 사내 제한</a:t>
+              <a:t>© 가상 ICT 기업 · IT-ACC-002-M · 사내 제한</a:t>
             </a:r>
           </a:p>
         </p:txBody>
@@ -24115,7 +24115,7 @@
                 <a:ea typeface="Malgun Gothic"/>
                 <a:cs typeface="Malgun Gothic"/>
               </a:rPr>
-              <a:t>© HANWHA SYSTEMS ICT · IT-ACC-002-M · 사내 제한</a:t>
+              <a:t>© 가상 ICT 기업 · IT-ACC-002-M · 사내 제한</a:t>
             </a:r>
           </a:p>
         </p:txBody>
@@ -24363,7 +24363,7 @@
                 <a:ea typeface="Malgun Gothic"/>
                 <a:cs typeface="Malgun Gothic"/>
               </a:rPr>
-              <a:t>© HANWHA SYSTEMS ICT · IT-ACC-002-M · 사내 제한</a:t>
+              <a:t>© 가상 ICT 기업 · IT-ACC-002-M · 사내 제한</a:t>
             </a:r>
           </a:p>
         </p:txBody>
@@ -25503,7 +25503,7 @@
                 <a:ea typeface="Malgun Gothic"/>
                 <a:cs typeface="Malgun Gothic"/>
               </a:rPr>
-              <a:t>© HANWHA SYSTEMS ICT · IT-ACC-002-M · 사내 제한</a:t>
+              <a:t>© 가상 ICT 기업 · IT-ACC-002-M · 사내 제한</a:t>
             </a:r>
           </a:p>
         </p:txBody>
@@ -25751,7 +25751,7 @@
                 <a:ea typeface="Malgun Gothic"/>
                 <a:cs typeface="Malgun Gothic"/>
               </a:rPr>
-              <a:t>© HANWHA SYSTEMS ICT · IT-ACC-002-M · 사내 제한</a:t>
+              <a:t>© 가상 ICT 기업 · IT-ACC-002-M · 사내 제한</a:t>
             </a:r>
           </a:p>
         </p:txBody>
@@ -27063,7 +27063,7 @@
                 <a:ea typeface="Malgun Gothic"/>
                 <a:cs typeface="Malgun Gothic"/>
               </a:rPr>
-              <a:t>© HANWHA SYSTEMS ICT · IT-ACC-002-M · 사내 제한</a:t>
+              <a:t>© 가상 ICT 기업 · IT-ACC-002-M · 사내 제한</a:t>
             </a:r>
           </a:p>
         </p:txBody>
@@ -28461,7 +28461,7 @@
                 <a:ea typeface="Malgun Gothic"/>
                 <a:cs typeface="Malgun Gothic"/>
               </a:rPr>
-              <a:t>© HANWHA SYSTEMS ICT · IT-ACC-002-M · 사내 제한</a:t>
+              <a:t>© 가상 ICT 기업 · IT-ACC-002-M · 사내 제한</a:t>
             </a:r>
           </a:p>
         </p:txBody>
@@ -29607,7 +29607,7 @@
                 <a:ea typeface="Malgun Gothic"/>
                 <a:cs typeface="Malgun Gothic"/>
               </a:rPr>
-              <a:t>© HANWHA SYSTEMS ICT · IT-ACC-002-M · 사내 제한</a:t>
+              <a:t>© 가상 ICT 기업 · IT-ACC-002-M · 사내 제한</a:t>
             </a:r>
           </a:p>
         </p:txBody>
@@ -29855,7 +29855,7 @@
                 <a:ea typeface="Malgun Gothic"/>
                 <a:cs typeface="Malgun Gothic"/>
               </a:rPr>
-              <a:t>© HANWHA SYSTEMS ICT · IT-ACC-002-M · 사내 제한</a:t>
+              <a:t>© 가상 ICT 기업 · IT-ACC-002-M · 사내 제한</a:t>
             </a:r>
           </a:p>
         </p:txBody>
@@ -30777,7 +30777,7 @@
                 <a:ea typeface="Malgun Gothic"/>
                 <a:cs typeface="Malgun Gothic"/>
               </a:rPr>
-              <a:t>© HANWHA SYSTEMS ICT · IT-ACC-002-M · 사내 제한</a:t>
+              <a:t>© 가상 ICT 기업 · IT-ACC-002-M · 사내 제한</a:t>
             </a:r>
           </a:p>
         </p:txBody>
@@ -31025,7 +31025,7 @@
                 <a:ea typeface="Malgun Gothic"/>
                 <a:cs typeface="Malgun Gothic"/>
               </a:rPr>
-              <a:t>© HANWHA SYSTEMS ICT · IT-ACC-002-M · 사내 제한</a:t>
+              <a:t>© 가상 ICT 기업 · IT-ACC-002-M · 사내 제한</a:t>
             </a:r>
           </a:p>
         </p:txBody>
@@ -34484,7 +34484,7 @@
                 <a:ea typeface="Malgun Gothic"/>
                 <a:cs typeface="Malgun Gothic"/>
               </a:rPr>
-              <a:t>© HANWHA SYSTEMS ICT · IT-ACC-002-M · 사내 제한</a:t>
+              <a:t>© 가상 ICT 기업 · IT-ACC-002-M · 사내 제한</a:t>
             </a:r>
           </a:p>
         </p:txBody>
@@ -36466,7 +36466,7 @@
                 <a:ea typeface="Malgun Gothic"/>
                 <a:cs typeface="Malgun Gothic"/>
               </a:rPr>
-              <a:t>© HANWHA SYSTEMS ICT · IT-ACC-002-M · 사내 제한</a:t>
+              <a:t>© 가상 ICT 기업 · IT-ACC-002-M · 사내 제한</a:t>
             </a:r>
           </a:p>
         </p:txBody>
@@ -36911,7 +36911,7 @@
                 <a:ea typeface="Malgun Gothic"/>
                 <a:cs typeface="Malgun Gothic"/>
               </a:rPr>
-              <a:t>© HANWHA SYSTEMS ICT · IT-ACC-002-M · 사내 제한</a:t>
+              <a:t>© 가상 ICT 기업 · IT-ACC-002-M · 사내 제한</a:t>
             </a:r>
           </a:p>
         </p:txBody>
